--- a/assets/pptx/catalog-515.pptx
+++ b/assets/pptx/catalog-515.pptx
@@ -3339,7 +3339,7 @@
                 <a:ea typeface="Ebrima"/>
                 <a:cs typeface="Ebrima"/>
               </a:rPr>
-              <a:t>አምላኬ ጌታዬ የእጄን ሰንሰለት በጠሰው (4x)</a:t>
+              <a:t>አምላኬ ጌታዬ የእጄን ሰንሰለት በጠሰው 4x</a:t>
             </a:r>
           </a:p>
         </p:txBody>
@@ -3424,7 +3424,7 @@
                 <a:ea typeface="Ebrima"/>
                 <a:cs typeface="Ebrima"/>
               </a:rPr>
-              <a:t>እግዚአብሔር/አምላኬ አቤቱ አቤቱ (2x)</a:t>
+              <a:t>እግዚአብሔር/አምላኬ አቤቱ አቤቱ 2x</a:t>
             </a:r>
           </a:p>
         </p:txBody>
@@ -3630,7 +3630,7 @@
                 <a:ea typeface="Ebrima"/>
                 <a:cs typeface="Ebrima"/>
               </a:rPr>
-              <a:t>እግዚአብሔር/አምላኬ አቤቱ አቤቱ (2x)</a:t>
+              <a:t>እግዚአብሔር/አምላኬ አቤቱ አቤቱ 2x</a:t>
             </a:r>
           </a:p>
         </p:txBody>
@@ -3939,7 +3939,7 @@
                 <a:ea typeface="Ebrima"/>
                 <a:cs typeface="Ebrima"/>
               </a:rPr>
-              <a:t>አቤቱ አንዳንተ ያለ የለም (2x)</a:t>
+              <a:t>አቤቱ አንዳንተ ያለ የለም 2x</a:t>
             </a:r>
           </a:p>
           <a:p>
@@ -4078,7 +4078,7 @@
                 <a:ea typeface="Ebrima"/>
                 <a:cs typeface="Ebrima"/>
               </a:rPr>
-              <a:t>ብለው ያመልኩሃል (2x)</a:t>
+              <a:t>ብለው ያመልኩሃል 2x</a:t>
             </a:r>
           </a:p>
         </p:txBody>
@@ -4163,7 +4163,7 @@
                 <a:ea typeface="Ebrima"/>
                 <a:cs typeface="Ebrima"/>
               </a:rPr>
-              <a:t>የልቤን የውስጤን ዘርዝሬ መናገር በቻልኩኝ (2x)</a:t>
+              <a:t>የልቤን የውስጤን ዘርዝሬ መናገር በቻልኩኝ 2x</a:t>
             </a:r>
           </a:p>
         </p:txBody>
@@ -4351,7 +4351,7 @@
                 <a:ea typeface="Ebrima"/>
                 <a:cs typeface="Ebrima"/>
               </a:rPr>
-              <a:t>አቤቱ አንዳንተ ያለ የለም (2x)</a:t>
+              <a:t>አቤቱ አንዳንተ ያለ የለም 2x</a:t>
             </a:r>
           </a:p>
           <a:p>
@@ -4508,7 +4508,7 @@
                 <a:ea typeface="Ebrima"/>
                 <a:cs typeface="Ebrima"/>
               </a:rPr>
-              <a:t>እስከዛሬ ካሉህ ኦሆሆ (2x)</a:t>
+              <a:t>እስከዛሬ ካሉህ ኦሆሆ 2x</a:t>
             </a:r>
           </a:p>
         </p:txBody>
@@ -4575,7 +4575,7 @@
                 <a:ea typeface="Ebrima"/>
                 <a:cs typeface="Ebrima"/>
               </a:rPr>
-              <a:t>አቤቱ አንዳንተ ያለ የለም (2x)</a:t>
+              <a:t>አቤቱ አንዳንተ ያለ የለም 2x</a:t>
             </a:r>
           </a:p>
           <a:p>
